--- a/classes/parte-2-deep-learning/115-learning-rate-scheduling/clase-115-learning-rate-scheduling-presentacion.pptx
+++ b/classes/parte-2-deep-learning/115-learning-rate-scheduling/clase-115-learning-rate-scheduling-presentacion.pptx
@@ -4823,7 +4823,7 @@
                 </a:solidFill>
                 <a:latin typeface="Segoe UI"/>
               </a:rPr>
-              <a:t>Primer bloque ejecutable del notebook.</a:t>
+              <a:t>Un schedule se pasa directamente como learning_rate= del optimizer.</a:t>
             </a:r>
           </a:p>
         </p:txBody>
@@ -4910,7 +4910,178 @@
                 </a:solidFill>
                 <a:latin typeface="Courier New"/>
               </a:rPr>
-              <a:t># Imports y configuración inicial</a:t>
+              <a:t>import numpy as np</a:t>
+            </a:r>
+          </a:p>
+          <a:p>
+            <a:pPr>
+              <a:defRPr sz="1200" b="0">
+                <a:solidFill>
+                  <a:srgbClr val="F8FAFC"/>
+                </a:solidFill>
+                <a:latin typeface="Courier New"/>
+              </a:defRPr>
+            </a:pPr>
+            <a:r>
+              <a:rPr sz="1200" b="0">
+                <a:solidFill>
+                  <a:srgbClr val="F8FAFC"/>
+                </a:solidFill>
+                <a:latin typeface="Courier New"/>
+              </a:rPr>
+              <a:t>from tensorflow import keras</a:t>
+            </a:r>
+          </a:p>
+          <a:p>
+            <a:pPr>
+              <a:defRPr sz="1200" b="0">
+                <a:solidFill>
+                  <a:srgbClr val="F8FAFC"/>
+                </a:solidFill>
+                <a:latin typeface="Courier New"/>
+              </a:defRPr>
+            </a:pPr>
+            <a:r>
+              <a:rPr sz="1200" b="0">
+                <a:solidFill>
+                  <a:srgbClr val="F8FAFC"/>
+                </a:solidFill>
+                <a:latin typeface="Courier New"/>
+              </a:rPr>
+              <a:t>from tensorflow.keras import layers</a:t>
+            </a:r>
+          </a:p>
+          <a:p>
+            <a:pPr>
+              <a:defRPr sz="1200" b="0">
+                <a:solidFill>
+                  <a:srgbClr val="F8FAFC"/>
+                </a:solidFill>
+                <a:latin typeface="Courier New"/>
+              </a:defRPr>
+            </a:pPr>
+            <a:r>
+              <a:rPr sz="1200" b="0">
+                <a:solidFill>
+                  <a:srgbClr val="F8FAFC"/>
+                </a:solidFill>
+                <a:latin typeface="Courier New"/>
+              </a:rPr>
+              <a:t>keras.utils.set_random_seed(42)</a:t>
+            </a:r>
+          </a:p>
+          <a:p>
+            <a:pPr>
+              <a:defRPr sz="1200" b="0">
+                <a:solidFill>
+                  <a:srgbClr val="F8FAFC"/>
+                </a:solidFill>
+                <a:latin typeface="Courier New"/>
+              </a:defRPr>
+            </a:pPr>
+            <a:r>
+              <a:rPr sz="1200" b="0">
+                <a:solidFill>
+                  <a:srgbClr val="F8FAFC"/>
+                </a:solidFill>
+                <a:latin typeface="Courier New"/>
+              </a:rPr>
+              <a:t> </a:t>
+            </a:r>
+          </a:p>
+          <a:p>
+            <a:pPr>
+              <a:defRPr sz="1200" b="0">
+                <a:solidFill>
+                  <a:srgbClr val="F8FAFC"/>
+                </a:solidFill>
+                <a:latin typeface="Courier New"/>
+              </a:defRPr>
+            </a:pPr>
+            <a:r>
+              <a:rPr sz="1200" b="0">
+                <a:solidFill>
+                  <a:srgbClr val="F8FAFC"/>
+                </a:solidFill>
+                <a:latin typeface="Courier New"/>
+              </a:rPr>
+              <a:t>exp = keras.optimizers.schedules.ExponentialDecay(</a:t>
+            </a:r>
+          </a:p>
+          <a:p>
+            <a:pPr>
+              <a:defRPr sz="1200" b="0">
+                <a:solidFill>
+                  <a:srgbClr val="F8FAFC"/>
+                </a:solidFill>
+                <a:latin typeface="Courier New"/>
+              </a:defRPr>
+            </a:pPr>
+            <a:r>
+              <a:rPr sz="1200" b="0">
+                <a:solidFill>
+                  <a:srgbClr val="F8FAFC"/>
+                </a:solidFill>
+                <a:latin typeface="Courier New"/>
+              </a:rPr>
+              <a:t>    initial_learning_rate=1e-3, decay_steps=1000, decay_rate=0.9)</a:t>
+            </a:r>
+          </a:p>
+          <a:p>
+            <a:pPr>
+              <a:defRPr sz="1200" b="0">
+                <a:solidFill>
+                  <a:srgbClr val="F8FAFC"/>
+                </a:solidFill>
+                <a:latin typeface="Courier New"/>
+              </a:defRPr>
+            </a:pPr>
+            <a:r>
+              <a:rPr sz="1200" b="0">
+                <a:solidFill>
+                  <a:srgbClr val="F8FAFC"/>
+                </a:solidFill>
+                <a:latin typeface="Courier New"/>
+              </a:rPr>
+              <a:t>print("LR exponencial en steps 0, 1000, 5000:",</a:t>
+            </a:r>
+          </a:p>
+          <a:p>
+            <a:pPr>
+              <a:defRPr sz="1200" b="0">
+                <a:solidFill>
+                  <a:srgbClr val="F8FAFC"/>
+                </a:solidFill>
+                <a:latin typeface="Courier New"/>
+              </a:defRPr>
+            </a:pPr>
+            <a:r>
+              <a:rPr sz="1200" b="0">
+                <a:solidFill>
+                  <a:srgbClr val="F8FAFC"/>
+                </a:solidFill>
+                <a:latin typeface="Courier New"/>
+              </a:rPr>
+              <a:t>      [round(float(exp(s)), 6) for s in (0, 1000, 5000)])</a:t>
+            </a:r>
+          </a:p>
+          <a:p>
+            <a:pPr>
+              <a:defRPr sz="1200" b="0">
+                <a:solidFill>
+                  <a:srgbClr val="F8FAFC"/>
+                </a:solidFill>
+                <a:latin typeface="Courier New"/>
+              </a:defRPr>
+            </a:pPr>
+            <a:r>
+              <a:rPr sz="1200" b="0">
+                <a:solidFill>
+                  <a:srgbClr val="F8FAFC"/>
+                </a:solidFill>
+                <a:latin typeface="Courier New"/>
+              </a:rPr>
+              <a:t>opt = keras.optimizers.Adam(learning_rate=exp)      # el schedule vive dentro del optimizer</a:t>
             </a:r>
           </a:p>
         </p:txBody>

--- a/classes/parte-2-deep-learning/115-learning-rate-scheduling/clase-115-learning-rate-scheduling-presentacion.pptx
+++ b/classes/parte-2-deep-learning/115-learning-rate-scheduling/clase-115-learning-rate-scheduling-presentacion.pptx
@@ -3272,7 +3272,7 @@
                 </a:solidFill>
                 <a:latin typeface="Segoe UI"/>
               </a:rPr>
-              <a:t>Parte: 2 — Deep Learning · Fuente: Géron, cap. 11 § Learning Rate Scheduling.  Duración estimada: 60 min.</a:t>
+              <a:t>Parte: 2 — Deep Learning · Fuente: Géron, cap. 11 § Learning Rate Scheduling.  Duración estimada: 60 min. · Nivel: Avanzado</a:t>
             </a:r>
           </a:p>
         </p:txBody>
@@ -3581,7 +3581,7 @@
                 </a:solidFill>
                 <a:latin typeface="Segoe UI"/>
               </a:rPr>
-              <a:t>Parte: 2 — Deep Learning · Fuente: Géron, cap. 11 § Learning Rate Scheduling.  Duración estimada: 60 min.</a:t>
+              <a:t>Parte: 2 — Deep Learning · Fuente: Géron, cap. 11 § Learning Rate Scheduling.  Duración estimada: 60 min. · Nivel: Avanzado</a:t>
             </a:r>
           </a:p>
         </p:txBody>
